--- a/Chapter 01 What is deep learning.pptx
+++ b/Chapter 01 What is deep learning.pptx
@@ -274,7 +274,7 @@
                 <a:latin typeface="맑은 고딕" panose="020B0503020000020004" pitchFamily="50" charset="-127"/>
                 <a:ea typeface="맑은 고딕" panose="020B0503020000020004" pitchFamily="50" charset="-127"/>
               </a:rPr>
-              <a:t>2026-07-02</a:t>
+              <a:t>2026-08-03</a:t>
             </a:fld>
             <a:endParaRPr lang="ko-KR" altLang="en-US">
               <a:latin typeface="맑은 고딕" panose="020B0503020000020004" pitchFamily="50" charset="-127"/>
@@ -460,7 +460,7 @@
           <a:p>
             <a:fld id="{43E1C3DD-4A19-441D-907C-380838DB51C4}" type="datetime1">
               <a:rPr lang="ko-KR" altLang="en-US" noProof="0" smtClean="0"/>
-              <a:t>2026-07-02</a:t>
+              <a:t>2026-08-03</a:t>
             </a:fld>
             <a:endParaRPr lang="ko-KR" altLang="en-US" noProof="0"/>
           </a:p>
@@ -1308,7 +1308,7 @@
           <a:p>
             <a:fld id="{990475B5-67CA-4281-BDCA-DA943C3C8EB3}" type="datetime1">
               <a:rPr lang="ko-KR" altLang="en-US" noProof="0" smtClean="0"/>
-              <a:t>2026-07-02</a:t>
+              <a:t>2026-08-03</a:t>
             </a:fld>
             <a:endParaRPr lang="ko-KR" altLang="en-US" noProof="0"/>
           </a:p>
@@ -1962,7 +1962,7 @@
           <a:p>
             <a:fld id="{48A87A34-81AB-432B-8DAE-1953F412C126}" type="datetimeFigureOut">
               <a:rPr lang="en-US" smtClean="0"/>
-              <a:t>7/2/2026</a:t>
+              <a:t>8/3/2026</a:t>
             </a:fld>
             <a:endParaRPr lang="en-US" dirty="0"/>
           </a:p>
@@ -2258,7 +2258,7 @@
           <a:p>
             <a:fld id="{C655C81E-72E7-4D05-94B5-F45B321A525D}" type="datetime1">
               <a:rPr lang="ko-KR" altLang="en-US" noProof="0" smtClean="0"/>
-              <a:t>2026-07-02</a:t>
+              <a:t>2026-08-03</a:t>
             </a:fld>
             <a:endParaRPr lang="ko-KR" altLang="en-US" noProof="0" dirty="0">
               <a:latin typeface="맑은 고딕" panose="020B0503020000020004" pitchFamily="50" charset="-127"/>
@@ -4635,7 +4635,7 @@
                 <a:latin typeface="D2Coding" panose="020B0609020101020101" pitchFamily="49" charset="-127"/>
                 <a:ea typeface="D2Coding" panose="020B0609020101020101" pitchFamily="49" charset="-127"/>
               </a:rPr>
-              <a:t>실습하고 발표하기</a:t>
+              <a:t>실습하고 제출하기</a:t>
             </a:r>
             <a:endParaRPr lang="en-US" altLang="ko-KR" sz="1600" dirty="0">
               <a:latin typeface="D2Coding" panose="020B0609020101020101" pitchFamily="49" charset="-127"/>
@@ -4716,19 +4716,8 @@
                 <a:latin typeface="D2Coding" panose="020B0609020101020101" pitchFamily="49" charset="-127"/>
                 <a:ea typeface="D2Coding" panose="020B0609020101020101" pitchFamily="49" charset="-127"/>
               </a:rPr>
-              <a:t>descent, optimizer, neuron, layer, </a:t>
-            </a:r>
-            <a:r>
-              <a:rPr lang="en-US" altLang="ko-KR" sz="1600">
-                <a:latin typeface="D2Coding" panose="020B0609020101020101" pitchFamily="49" charset="-127"/>
-                <a:ea typeface="D2Coding" panose="020B0609020101020101" pitchFamily="49" charset="-127"/>
-              </a:rPr>
-              <a:t>loss function</a:t>
-            </a:r>
-            <a:endParaRPr lang="en-US" altLang="ko-KR" sz="1600" dirty="0">
-              <a:latin typeface="D2Coding" panose="020B0609020101020101" pitchFamily="49" charset="-127"/>
-              <a:ea typeface="D2Coding" panose="020B0609020101020101" pitchFamily="49" charset="-127"/>
-            </a:endParaRPr>
+              <a:t>descent, optimizer, neuron, layer, loss function</a:t>
+            </a:r>
           </a:p>
         </p:txBody>
       </p:sp>
@@ -8989,8 +8978,8 @@
         </p:nvSpPr>
         <p:spPr>
           <a:xfrm>
-            <a:off x="577530" y="1248422"/>
-            <a:ext cx="11233469" cy="3670685"/>
+            <a:off x="568005" y="2332321"/>
+            <a:ext cx="11233469" cy="2193357"/>
           </a:xfrm>
           <a:prstGeom prst="rect">
             <a:avLst/>
@@ -9002,17 +8991,6 @@
             <a:spAutoFit/>
           </a:bodyPr>
           <a:lstStyle/>
-          <a:p>
-            <a:pPr>
-              <a:lnSpc>
-                <a:spcPct val="200000"/>
-              </a:lnSpc>
-            </a:pPr>
-            <a:r>
-              <a:rPr lang="en-US" altLang="ko-KR" sz="2400" dirty="0"/>
-              <a:t>This chapter covers</a:t>
-            </a:r>
-          </a:p>
           <a:p>
             <a:pPr marL="800100" lvl="1" indent="-342900">
               <a:lnSpc>
@@ -9051,16 +9029,6 @@
               <a:rPr lang="en-US" altLang="ko-KR" sz="2400" dirty="0"/>
               <a:t>Deep learning’s rising popularity and future potential</a:t>
             </a:r>
-          </a:p>
-          <a:p>
-            <a:pPr marL="800100" lvl="1" indent="-342900">
-              <a:lnSpc>
-                <a:spcPct val="200000"/>
-              </a:lnSpc>
-              <a:buFont typeface="Wingdings" panose="05000000000000000000" pitchFamily="2" charset="2"/>
-              <a:buChar char="v"/>
-            </a:pPr>
-            <a:endParaRPr lang="en-US" altLang="ko-KR" sz="2400" dirty="0"/>
           </a:p>
         </p:txBody>
       </p:sp>
